--- a/cursos/recursos/estrategia-en-el-final/04-incursiones-y-refugio.pptx
+++ b/cursos/recursos/estrategia-en-el-final/04-incursiones-y-refugio.pptx
@@ -4452,7 +4452,7 @@
                 </a:solidFill>
                 <a:latin typeface="Cambria"/>
               </a:rPr>
-              <a:t>En tus tres últimas partidas con final de torres, busca la casilla por la que el rey rival podía haber entrado. Si no había ninguna, busca la que vos dejaste abierta.</a:t>
+              <a:t>En tus tres últimas partidas con final de torres, busca la casilla por la que el rey rival podía haber entrado. Si no había ninguna, busca la que tú dejaste abierta.</a:t>
             </a:r>
           </a:p>
         </p:txBody>
